--- a/Clients/CNBC/presentation/Technijian for CNBC - Meeting Deck.pptx
+++ b/Clients/CNBC/presentation/Technijian for CNBC - Meeting Deck.pptx
@@ -9014,7 +9014,7 @@
                 <a:ea typeface="Arial" pitchFamily="34" charset="-122"/>
                 <a:cs typeface="Arial" pitchFamily="34" charset="-120"/>
               </a:rPr>
-              <a:t>•  A credentialed team and a 24/7 Security Operations Center behind every laptop</a:t>
+              <a:t>•  A credentialed team and 24/7 managed detection &amp; response behind every laptop</a:t>
             </a:r>
             <a:endParaRPr lang="en-US" sz="1200" dirty="0"/>
           </a:p>
@@ -10464,7 +10464,7 @@
                 <a:ea typeface="Arial" pitchFamily="34" charset="-122"/>
                 <a:cs typeface="Arial" pitchFamily="34" charset="-120"/>
               </a:rPr>
-              <a:t>A Security Operations Center watching alerts around the clock, with a defined response when something looks wrong — across every time zone your team works in.</a:t>
+              <a:t>Managed detection &amp; response watching alerts around the clock, with a defined response when something looks wrong — across every time zone your team works in.</a:t>
             </a:r>
             <a:endParaRPr lang="en-US" sz="1050" dirty="0"/>
           </a:p>
@@ -11099,7 +11099,7 @@
                 <a:ea typeface="Arial" pitchFamily="34" charset="-122"/>
                 <a:cs typeface="Arial" pitchFamily="34" charset="-120"/>
               </a:rPr>
-              <a:t>24/7 SOC</a:t>
+              <a:t>24/7 MDR</a:t>
             </a:r>
             <a:endParaRPr lang="en-US" sz="900" dirty="0"/>
           </a:p>
